--- a/dist/초6/수학/연산과비례/초6_수학_연산과비례_09_소수의나눗셈3_학생용.pptx
+++ b/dist/초6/수학/연산과비례/초6_수학_연산과비례_09_소수의나눗셈3_학생용.pptx
@@ -120,13 +120,13 @@
   <p:extLst>
     <p:ext uri="{521415D9-36F7-43E2-AB2F-B90AF26B5E84}">
       <p14:sectionLst xmlns:p14="http://schemas.microsoft.com/office/powerpoint/2010/main">
-        <p14:section name="도입" id="{011d457a-bfba-67fd-80be-7f6c5ff0a317}">
+        <p14:section name="도입" id="{76873c43-85ea-a8f8-e132-3be8e1f1ef54}">
           <p14:sldIdLst>
             <p14:sldId id="256"/>
             <p14:sldId id="257"/>
           </p14:sldIdLst>
         </p14:section>
-        <p14:section name="개념" id="{044a24ad-9873-1683-d3b0-64f63c154c0a}">
+        <p14:section name="개념" id="{0cea0780-fe2a-9f2c-7384-0cc6de4eb759}">
           <p14:sldIdLst>
             <p14:sldId id="258"/>
             <p14:sldId id="259"/>
@@ -134,7 +134,7 @@
             <p14:sldId id="263"/>
           </p14:sldIdLst>
         </p14:section>
-        <p14:section name="연습" id="{21b28f17-c281-a340-e83c-c6c41e48aad5}">
+        <p14:section name="연습" id="{5be22b46-ce27-0b34-4c64-8dc4a29a3d6b}">
           <p14:sldIdLst>
             <p14:sldId id="260"/>
             <p14:sldId id="261"/>
@@ -142,24 +142,24 @@
             <p14:sldId id="265"/>
           </p14:sldIdLst>
         </p14:section>
-        <p14:section name="개념" id="{9ae667ab-61a6-0faa-9b82-651ce8e95f6b}">
+        <p14:section name="개념" id="{6e0db4b1-62cc-457c-4a94-ed25519998d0}">
           <p14:sldIdLst/>
         </p14:section>
-        <p14:section name="연습" id="{90e1ea4c-f093-6f66-bdea-c13522ef7014}">
+        <p14:section name="연습" id="{37607674-6705-8fd0-1ea9-9b6a42222fd8}">
           <p14:sldIdLst/>
         </p14:section>
-        <p14:section name="확인" id="{53329b99-2945-83a1-bba5-76ca7df2c2b5}">
+        <p14:section name="확인" id="{2a4eea92-185b-58e8-868d-396e84cb12e8}">
           <p14:sldIdLst>
             <p14:sldId id="266"/>
             <p14:sldId id="267"/>
           </p14:sldIdLst>
         </p14:section>
-        <p14:section name="정리" id="{57dc193f-6855-4848-b0f9-a1fdd4df0ba6}">
+        <p14:section name="정리" id="{75cee216-ad49-aaef-2cd4-2c3fa56340fa}">
           <p14:sldIdLst>
             <p14:sldId id="268"/>
           </p14:sldIdLst>
         </p14:section>
-        <p14:section name="보충" id="{25628da6-d934-06e9-ffbd-3be20e681724}">
+        <p14:section name="보충" id="{696c1ef9-ea63-09b8-85a4-3cc45c6844ee}">
           <p14:sldIdLst>
             <p14:sldId id="269"/>
           </p14:sldIdLst>
